--- a/presentation/VoiceRiders-NLP-Presentation.pptx
+++ b/presentation/VoiceRiders-NLP-Presentation.pptx
@@ -4503,7 +4503,7 @@
                 </a:solidFill>
                 <a:latin typeface="Segoe UI"/>
               </a:rPr>
-              <a:t>•  177 training utterances, 10 intents</a:t>
+              <a:t>•  177 labelled utterances (123 train / 54 held out)</a:t>
             </a:r>
           </a:p>
         </p:txBody>
@@ -5888,7 +5888,7 @@
                 </a:solidFill>
                 <a:latin typeface="Segoe UI"/>
               </a:rPr>
-              <a:t>So the job is not “transcribe”. It is: turn a noisy 3-second clip into one of ten actions, and know when to do nothing at all.</a:t>
+              <a:t>So the job is not “transcribe”. It is: turn a noisy 3-second clip into one of ten intents, and know when to do nothing at all.</a:t>
             </a:r>
           </a:p>
         </p:txBody>
@@ -6099,7 +6099,7 @@
                 </a:solidFill>
                 <a:latin typeface="Segoe UI"/>
               </a:rPr>
-              <a:t>From microphone to Spotify in seven steps — five of them NLP</a:t>
+              <a:t>From microphone to Spotify in seven steps</a:t>
             </a:r>
           </a:p>
         </p:txBody>
@@ -9921,7 +9921,7 @@
                 </a:solidFill>
                 <a:latin typeface="Segoe UI"/>
               </a:rPr>
-              <a:t>•  Trained in Python, exported to model.json (dot products on-device)</a:t>
+              <a:t>•  Trained in Python on 123 utterances, evaluated on 54 held out</a:t>
             </a:r>
           </a:p>
           <a:p>
@@ -10056,7 +10056,7 @@
         <p:spPr>
           <a:xfrm>
             <a:off x="868680" y="4709160"/>
-            <a:ext cx="1463040" cy="256032"/>
+            <a:ext cx="1737360" cy="256032"/>
           </a:xfrm>
           <a:prstGeom prst="rect">
             <a:avLst/>
@@ -10077,7 +10077,7 @@
                 </a:solidFill>
                 <a:latin typeface="Segoe UI"/>
               </a:rPr>
-              <a:t>utterances</a:t>
+              <a:t>labelled utterances</a:t>
             </a:r>
           </a:p>
         </p:txBody>
@@ -10392,7 +10392,7 @@
                 </a:solidFill>
                 <a:latin typeface="Segoe UI"/>
               </a:rPr>
-              <a:t>~1 ms</a:t>
+              <a:t>&lt; 5 ms</a:t>
             </a:r>
           </a:p>
         </p:txBody>
@@ -10406,7 +10406,7 @@
         <p:spPr>
           <a:xfrm>
             <a:off x="9281160" y="4709160"/>
-            <a:ext cx="1828800" cy="256032"/>
+            <a:ext cx="2011680" cy="256032"/>
           </a:xfrm>
           <a:prstGeom prst="rect">
             <a:avLst/>
@@ -10427,7 +10427,7 @@
                 </a:solidFill>
                 <a:latin typeface="Segoe UI"/>
               </a:rPr>
-              <a:t>per utterance</a:t>
+              <a:t>inference, offline</a:t>
             </a:r>
           </a:p>
         </p:txBody>
